--- a/artifacts/jac-dependency-advisor/jac_dependency_idea.pptx
+++ b/artifacts/jac-dependency-advisor/jac_dependency_idea.pptx
@@ -861,7 +861,7 @@
           <a:lstStyle/>
           <a:p>
             <a:r>
-              <a:t>Pre-execution inspection does not make a query result permanently valid. Suppose B's inspection finds no outgoing Edge links, but an earlier ability A adds a link to n4. B must use the updated graph in the serial program. Tracking only the originally returned nodes would miss this change because the old result was empty. Record the graph data examined by the lookup as well: for a simple one-hop query, a conservative version of the origin's adjacency can detect insertions, deletions, and ordering changes. Also cover node and edge liveness, type matching, and all predicate inputs, including fields of rejected candidates. When earlier work invalidates an inspection, re-run it and update scheduling dependencies before launching the body. The same rule applies if a possible writer's target set changes. Re-inspection must happen against a coherent view, and its dependencies must be registered atomically with validation or protected by an equivalent protocol; a bare version check followed by an unprotected launch is insufficient. Earlier calls whose accesses cannot be bounded retain conservative barriers or speculative validation. Keep the existing instrumentation initially, so inspection improves scheduling without being the sole correctness mechanism. The current prototype serializes graph mutation through fallback. A first performance experiment can keep topology fixed and exercise mutation/invalidation correctness separately.</a:t>
+              <a:t>Pre-execution inspection does not make a query result permanently valid. Suppose B's inspection finds no outgoing Edge links, but an earlier ability A adds a link to n4. B must use the updated graph in the serial program. Tracking only the originally returned nodes would miss this change because the old result was empty. Record the graph data examined at every hop, including intermediate nodes' searched adjacency and empty lookups. Conservative adjacency versions can detect insertions, deletions, and ordering changes. Also cover node and edge liveness, type matching, and all predicate inputs, including fields of rejected candidates. Intermediate query results can feed later hops inside the inspection function; the ability body need not start. When earlier work invalidates an inspection, re-run it and update scheduling dependencies before launching the body. The same rule applies if a possible writer's target set changes. Re-inspection must happen against a coherent view, and its dependencies must be registered atomically with validation or protected by an equivalent protocol; a bare version check followed by an unprotected launch is insufficient. Earlier calls whose accesses cannot be bounded retain conservative barriers or speculative validation. Keep the existing instrumentation initially, so inspection improves scheduling without being the sole correctness mechanism. The current prototype serializes graph mutation through fallback. A first performance experiment can keep topology fixed and exercise mutation/invalidation correctness separately.</a:t>
             </a:r>
           </a:p>
         </p:txBody>
@@ -1071,7 +1071,7 @@
           <a:lstStyle/>
           <a:p>
             <a:r>
-              <a:t>The first experiment should be deliberately narrow: queued native entry-ability calls with known starting nodes, simple one-hop typed queries, safe query inputs, and conservative read/write summaries. Generate inspectors and schedule calls before their bodies start. Preserve original-order effects and existing speculative validation. Unknown calls, accesses whose targets depend on unavailable body results, and unsupported effects keep conservative or existing fallback handling; the experiment does not require splitting general ability bodies into computation and effect phases. Check shared neighbors, aliases, read-before-write order, multiple writers, empty queries, and invalidation after graph changes. Future calls produced by visit are inspected once they are known. For performance, begin with fixed topology and vary overlap and computation cost, accounting for every inspection. The candidate research contribution is automatically generating useful dependency inspection from Jac graph syntax and integrating it with ordered walker semantics. Inspector-executor scheduling and semantic concurrency control already exist. The contribution must be established by extraction coverage, soundness, and a measured advantage over appropriate baselines, not by the scheduling pattern alone.</a:t>
+              <a:t>Support complete eligible graph queries, including multi-hop chains. Eligibility depends on whether query inputs can be obtained safely before the ability body starts, not on hop count. A later hop can consume an earlier hop's result entirely within the inspector. The native compiler already lowers query chains through refs and refs_many; inspector generation can reuse this query structure, while adding conservative read/write summaries and tracking graph data examined at every hop. Generate inspectors for queued native entry-ability calls and schedule before their bodies start. Preserve original-order effects and existing speculative validation. Unknown calls, accesses whose targets depend on unavailable body results, and unsupported effects keep conservative or existing fallback handling; the experiment does not require splitting general ability bodies into computation and effect phases. Check shared neighbors, aliases, read-before-write order, multiple writers, empty intermediate results, intermediate-edge changes, and predicate invalidation. Future calls produced by visit are inspected once they are known. For performance, vary hop count, fan-out, overlap, and computation cost, accounting for every inspection. The candidate research contribution is automatically generating useful dependency inspection from Jac graph syntax and integrating it with ordered walker semantics. Inspector-executor scheduling and semantic concurrency control already exist. The contribution must be established by extraction coverage, soundness, and a measured advantage over appropriate baselines, not by the scheduling pattern alone.</a:t>
             </a:r>
           </a:p>
         </p:txBody>
@@ -14843,7 +14843,7 @@
                 </a:solidFill>
                 <a:latin typeface="Arial"/>
               </a:rPr>
-              <a:t>Inspect simple</a:t>
+              <a:t>Inspect complete</a:t>
             </a:r>
           </a:p>
           <a:p>
@@ -14910,7 +14910,7 @@
                 </a:solidFill>
                 <a:latin typeface="Arial"/>
               </a:rPr>
-              <a:t>Known starting node.</a:t>
+              <a:t>Available, safe inputs.</a:t>
             </a:r>
           </a:p>
           <a:p>
@@ -14932,7 +14932,7 @@
                 </a:solidFill>
                 <a:latin typeface="Arial"/>
               </a:rPr>
-              <a:t>One-hop graph queries.</a:t>
+              <a:t>Include multi-hop queries.</a:t>
             </a:r>
           </a:p>
           <a:p>
